--- a/classes/parte-2-criptografia-aplicada/063-gestion-de-secretos-vault-y-kms/clase-063-presentacion.pptx
+++ b/classes/parte-2-criptografia-aplicada/063-gestion-de-secretos-vault-y-kms/clase-063-presentacion.pptx
@@ -17,6 +17,8 @@
     <p:sldId id="265" r:id="rId16"/>
     <p:sldId id="266" r:id="rId17"/>
     <p:sldId id="267" r:id="rId18"/>
+    <p:sldId id="268" r:id="rId19"/>
+    <p:sldId id="269" r:id="rId20"/>
   </p:sldIdLst>
   <p:sldSz cx="9144000" cy="6858000" type="screen4x3"/>
   <p:notesSz cx="6858000" cy="9144000"/>
@@ -3198,7 +3200,7 @@
                   <a:srgbClr val="0B3D2E"/>
                 </a:solidFill>
               </a:rPr>
-              <a:t>⚠️ Errores comunes</a:t>
+              <a:t>📝 Reto verificable</a:t>
             </a:r>
           </a:p>
         </p:txBody>
@@ -3236,67 +3238,7 @@
                   <a:srgbClr val="22282E"/>
                 </a:solidFill>
               </a:rPr>
-              <a:t>•  Secretos hardcodeados en el repo — Fuga; usa un gestor de secretos y escanea el histórico</a:t>
-            </a:r>
-          </a:p>
-          <a:p>
-            <a:pPr>
-              <a:spcAft>
-                <a:spcPts val="600"/>
-              </a:spcAft>
-            </a:pPr>
-            <a:r>
-              <a:rPr sz="1500">
-                <a:solidFill>
-                  <a:srgbClr val="22282E"/>
-                </a:solidFill>
-              </a:rPr>
-              <a:t>•  Misma clave para todo y sin rotación — Compromiso total; usa KEK/DEK y rota</a:t>
-            </a:r>
-          </a:p>
-          <a:p>
-            <a:pPr>
-              <a:spcAft>
-                <a:spcPts val="600"/>
-              </a:spcAft>
-            </a:pPr>
-            <a:r>
-              <a:rPr sz="1500">
-                <a:solidFill>
-                  <a:srgbClr val="22282E"/>
-                </a:solidFill>
-              </a:rPr>
-              <a:t>•  Vault -dev en producción — Inseguro; despliega con almacenamiento y TLS reales</a:t>
-            </a:r>
-          </a:p>
-          <a:p>
-            <a:pPr>
-              <a:spcAft>
-                <a:spcPts val="600"/>
-              </a:spcAft>
-            </a:pPr>
-            <a:r>
-              <a:rPr sz="1500">
-                <a:solidFill>
-                  <a:srgbClr val="22282E"/>
-                </a:solidFill>
-              </a:rPr>
-              <a:t>•  Permisos excesivos (todos leen todo) — Aplica mínimo privilegio con políticas</a:t>
-            </a:r>
-          </a:p>
-          <a:p>
-            <a:pPr>
-              <a:spcAft>
-                <a:spcPts val="600"/>
-              </a:spcAft>
-            </a:pPr>
-            <a:r>
-              <a:rPr sz="1500">
-                <a:solidFill>
-                  <a:srgbClr val="22282E"/>
-                </a:solidFill>
-              </a:rPr>
-              <a:t>•  DEK almacenada en claro — Cífrala con la KEK del KMS/Vault</a:t>
+              <a:t>•  Implementa envelope encryption en una pequeña app: genera una DEK por objeto, cifra los datos con AES-GCM y protege la DEK con el motor transit de Vault (o un KMS de laboratorio); guarda solo el dato…</a:t>
             </a:r>
           </a:p>
         </p:txBody>
@@ -3347,7 +3289,7 @@
                   <a:srgbClr val="0B3D2E"/>
                 </a:solidFill>
               </a:rPr>
-              <a:t>❓ Preguntas frecuentes</a:t>
+              <a:t>⚠️ Errores comunes</a:t>
             </a:r>
           </a:p>
         </p:txBody>
@@ -3385,82 +3327,67 @@
                   <a:srgbClr val="22282E"/>
                 </a:solidFill>
               </a:rPr>
-              <a:t>•  ❓ ¿KMS o Vault?</a:t>
-            </a:r>
-          </a:p>
-          <a:p>
-            <a:pPr>
-              <a:spcAft>
-                <a:spcPts val="600"/>
-              </a:spcAft>
-            </a:pPr>
-            <a:r>
-              <a:rPr sz="1500">
-                <a:solidFill>
-                  <a:srgbClr val="22282E"/>
-                </a:solidFill>
-              </a:rPr>
-              <a:t>•  KMS gestiona claves (a menudo con HSM) y ofrece cifrado como servicio; Vault añade secretos dinámicos, KV y motores múltiples. Suelen complementarse.</a:t>
-            </a:r>
-          </a:p>
-          <a:p>
-            <a:pPr>
-              <a:spcAft>
-                <a:spcPts val="600"/>
-              </a:spcAft>
-            </a:pPr>
-            <a:r>
-              <a:rPr sz="1500">
-                <a:solidFill>
-                  <a:srgbClr val="22282E"/>
-                </a:solidFill>
-              </a:rPr>
-              <a:t>•  ❓ ¿Qué es envelope encryption y por qué usarla?</a:t>
-            </a:r>
-          </a:p>
-          <a:p>
-            <a:pPr>
-              <a:spcAft>
-                <a:spcPts val="600"/>
-              </a:spcAft>
-            </a:pPr>
-            <a:r>
-              <a:rPr sz="1500">
-                <a:solidFill>
-                  <a:srgbClr val="22282E"/>
-                </a:solidFill>
-              </a:rPr>
-              <a:t>•  Cifrar datos con DEKs y proteger esas DEKs con una KEK del KMS; escala, limita el uso de la clave maestra y facilita la rotación.</a:t>
-            </a:r>
-          </a:p>
-          <a:p>
-            <a:pPr>
-              <a:spcAft>
-                <a:spcPts val="600"/>
-              </a:spcAft>
-            </a:pPr>
-            <a:r>
-              <a:rPr sz="1500">
-                <a:solidFill>
-                  <a:srgbClr val="22282E"/>
-                </a:solidFill>
-              </a:rPr>
-              <a:t>•  ❓ ¿Cada cuánto rotar claves?</a:t>
-            </a:r>
-          </a:p>
-          <a:p>
-            <a:pPr>
-              <a:spcAft>
-                <a:spcPts val="600"/>
-              </a:spcAft>
-            </a:pPr>
-            <a:r>
-              <a:rPr sz="1500">
-                <a:solidFill>
-                  <a:srgbClr val="22282E"/>
-                </a:solidFill>
-              </a:rPr>
-              <a:t>•  Según política y sensibilidad; adopta rotación automatizada y rota de inmediato ante sospecha de compromiso.</a:t>
+              <a:t>•  Secretos hardcodeados en el repo — Fuga; usa un gestor de secretos y escanea el histórico</a:t>
+            </a:r>
+          </a:p>
+          <a:p>
+            <a:pPr>
+              <a:spcAft>
+                <a:spcPts val="600"/>
+              </a:spcAft>
+            </a:pPr>
+            <a:r>
+              <a:rPr sz="1500">
+                <a:solidFill>
+                  <a:srgbClr val="22282E"/>
+                </a:solidFill>
+              </a:rPr>
+              <a:t>•  Misma clave para todo y sin rotación — Compromiso total; usa KEK/DEK y rota</a:t>
+            </a:r>
+          </a:p>
+          <a:p>
+            <a:pPr>
+              <a:spcAft>
+                <a:spcPts val="600"/>
+              </a:spcAft>
+            </a:pPr>
+            <a:r>
+              <a:rPr sz="1500">
+                <a:solidFill>
+                  <a:srgbClr val="22282E"/>
+                </a:solidFill>
+              </a:rPr>
+              <a:t>•  Vault -dev en producción — Inseguro; despliega con almacenamiento y TLS reales</a:t>
+            </a:r>
+          </a:p>
+          <a:p>
+            <a:pPr>
+              <a:spcAft>
+                <a:spcPts val="600"/>
+              </a:spcAft>
+            </a:pPr>
+            <a:r>
+              <a:rPr sz="1500">
+                <a:solidFill>
+                  <a:srgbClr val="22282E"/>
+                </a:solidFill>
+              </a:rPr>
+              <a:t>•  Permisos excesivos (todos leen todo) — Aplica mínimo privilegio con políticas</a:t>
+            </a:r>
+          </a:p>
+          <a:p>
+            <a:pPr>
+              <a:spcAft>
+                <a:spcPts val="600"/>
+              </a:spcAft>
+            </a:pPr>
+            <a:r>
+              <a:rPr sz="1500">
+                <a:solidFill>
+                  <a:srgbClr val="22282E"/>
+                </a:solidFill>
+              </a:rPr>
+              <a:t>•  DEK almacenada en claro — Cífrala con la KEK del KMS/Vault</a:t>
             </a:r>
           </a:p>
         </p:txBody>
@@ -3511,7 +3438,7 @@
                   <a:srgbClr val="0B3D2E"/>
                 </a:solidFill>
               </a:rPr>
-              <a:t>🔗 Referencias</a:t>
+              <a:t>❓ Preguntas frecuentes</a:t>
             </a:r>
           </a:p>
         </p:txBody>
@@ -3549,6 +3476,170 @@
                   <a:srgbClr val="22282E"/>
                 </a:solidFill>
               </a:rPr>
+              <a:t>•  ❓ ¿KMS o Vault?</a:t>
+            </a:r>
+          </a:p>
+          <a:p>
+            <a:pPr>
+              <a:spcAft>
+                <a:spcPts val="600"/>
+              </a:spcAft>
+            </a:pPr>
+            <a:r>
+              <a:rPr sz="1500">
+                <a:solidFill>
+                  <a:srgbClr val="22282E"/>
+                </a:solidFill>
+              </a:rPr>
+              <a:t>•  KMS gestiona claves (a menudo con HSM) y ofrece cifrado como servicio; Vault añade secretos dinámicos, KV y motores múltiples. Suelen complementarse.</a:t>
+            </a:r>
+          </a:p>
+          <a:p>
+            <a:pPr>
+              <a:spcAft>
+                <a:spcPts val="600"/>
+              </a:spcAft>
+            </a:pPr>
+            <a:r>
+              <a:rPr sz="1500">
+                <a:solidFill>
+                  <a:srgbClr val="22282E"/>
+                </a:solidFill>
+              </a:rPr>
+              <a:t>•  ❓ ¿Qué es envelope encryption y por qué usarla?</a:t>
+            </a:r>
+          </a:p>
+          <a:p>
+            <a:pPr>
+              <a:spcAft>
+                <a:spcPts val="600"/>
+              </a:spcAft>
+            </a:pPr>
+            <a:r>
+              <a:rPr sz="1500">
+                <a:solidFill>
+                  <a:srgbClr val="22282E"/>
+                </a:solidFill>
+              </a:rPr>
+              <a:t>•  Cifrar datos con DEKs y proteger esas DEKs con una KEK del KMS; escala, limita el uso de la clave maestra y facilita la rotación.</a:t>
+            </a:r>
+          </a:p>
+          <a:p>
+            <a:pPr>
+              <a:spcAft>
+                <a:spcPts val="600"/>
+              </a:spcAft>
+            </a:pPr>
+            <a:r>
+              <a:rPr sz="1500">
+                <a:solidFill>
+                  <a:srgbClr val="22282E"/>
+                </a:solidFill>
+              </a:rPr>
+              <a:t>•  ❓ ¿Cada cuánto rotar claves?</a:t>
+            </a:r>
+          </a:p>
+          <a:p>
+            <a:pPr>
+              <a:spcAft>
+                <a:spcPts val="600"/>
+              </a:spcAft>
+            </a:pPr>
+            <a:r>
+              <a:rPr sz="1500">
+                <a:solidFill>
+                  <a:srgbClr val="22282E"/>
+                </a:solidFill>
+              </a:rPr>
+              <a:t>•  Según política y sensibilidad; adopta rotación automatizada y rota de inmediato ante sospecha de compromiso.</a:t>
+            </a:r>
+          </a:p>
+        </p:txBody>
+      </p:sp>
+    </p:spTree>
+  </p:cSld>
+  <p:clrMapOvr>
+    <a:masterClrMapping/>
+  </p:clrMapOvr>
+</p:sld>
+</file>
+
+<file path=ppt/slides/slide13.xml><?xml version="1.0" encoding="utf-8"?>
+<p:sld xmlns:a="http://schemas.openxmlformats.org/drawingml/2006/main" xmlns:p="http://schemas.openxmlformats.org/presentationml/2006/main" xmlns:r="http://schemas.openxmlformats.org/officeDocument/2006/relationships">
+  <p:cSld>
+    <p:spTree>
+      <p:nvGrpSpPr>
+        <p:cNvPr id="1" name=""/>
+        <p:cNvGrpSpPr/>
+        <p:nvPr/>
+      </p:nvGrpSpPr>
+      <p:grpSpPr/>
+      <p:sp>
+        <p:nvSpPr>
+          <p:cNvPr id="2" name="TextBox 1"/>
+          <p:cNvSpPr txBox="1"/>
+          <p:nvPr/>
+        </p:nvSpPr>
+        <p:spPr>
+          <a:xfrm>
+            <a:off x="457200" y="320040"/>
+            <a:ext cx="8229600" cy="822960"/>
+          </a:xfrm>
+          <a:prstGeom prst="rect">
+            <a:avLst/>
+          </a:prstGeom>
+          <a:noFill/>
+        </p:spPr>
+        <p:txBody>
+          <a:bodyPr wrap="square">
+            <a:spAutoFit/>
+          </a:bodyPr>
+          <a:lstStyle/>
+          <a:p>
+            <a:r>
+              <a:rPr sz="2600" b="1">
+                <a:solidFill>
+                  <a:srgbClr val="0B3D2E"/>
+                </a:solidFill>
+              </a:rPr>
+              <a:t>🔗 Referencias</a:t>
+            </a:r>
+          </a:p>
+        </p:txBody>
+      </p:sp>
+      <p:sp>
+        <p:nvSpPr>
+          <p:cNvPr id="3" name="TextBox 2"/>
+          <p:cNvSpPr txBox="1"/>
+          <p:nvPr/>
+        </p:nvSpPr>
+        <p:spPr>
+          <a:xfrm>
+            <a:off x="457200" y="1280160"/>
+            <a:ext cx="8229600" cy="4937760"/>
+          </a:xfrm>
+          <a:prstGeom prst="rect">
+            <a:avLst/>
+          </a:prstGeom>
+          <a:noFill/>
+        </p:spPr>
+        <p:txBody>
+          <a:bodyPr wrap="square">
+            <a:spAutoFit/>
+          </a:bodyPr>
+          <a:lstStyle/>
+          <a:p>
+            <a:pPr>
+              <a:spcAft>
+                <a:spcPts val="600"/>
+              </a:spcAft>
+            </a:pPr>
+            <a:r>
+              <a:rPr sz="1500">
+                <a:solidFill>
+                  <a:srgbClr val="22282E"/>
+                </a:solidFill>
+              </a:rPr>
               <a:t>•  HashiCorp Vault docs — &lt;https://developer.hashicorp.com/vault/docs&gt;</a:t>
             </a:r>
           </a:p>
@@ -3599,6 +3690,81 @@
           </a:p>
         </p:txBody>
       </p:sp>
+    </p:spTree>
+  </p:cSld>
+  <p:clrMapOvr>
+    <a:masterClrMapping/>
+  </p:clrMapOvr>
+</p:sld>
+</file>
+
+<file path=ppt/slides/slide14.xml><?xml version="1.0" encoding="utf-8"?>
+<p:sld xmlns:a="http://schemas.openxmlformats.org/drawingml/2006/main" xmlns:p="http://schemas.openxmlformats.org/presentationml/2006/main" xmlns:r="http://schemas.openxmlformats.org/officeDocument/2006/relationships">
+  <p:cSld>
+    <p:spTree>
+      <p:nvGrpSpPr>
+        <p:cNvPr id="1" name=""/>
+        <p:cNvGrpSpPr/>
+        <p:nvPr/>
+      </p:nvGrpSpPr>
+      <p:grpSpPr/>
+      <p:sp>
+        <p:nvSpPr>
+          <p:cNvPr id="2" name="TextBox 1"/>
+          <p:cNvSpPr txBox="1"/>
+          <p:nvPr/>
+        </p:nvSpPr>
+        <p:spPr>
+          <a:xfrm>
+            <a:off x="457200" y="274320"/>
+            <a:ext cx="8229600" cy="640080"/>
+          </a:xfrm>
+          <a:prstGeom prst="rect">
+            <a:avLst/>
+          </a:prstGeom>
+          <a:noFill/>
+        </p:spPr>
+        <p:txBody>
+          <a:bodyPr wrap="square">
+            <a:spAutoFit/>
+          </a:bodyPr>
+          <a:lstStyle/>
+          <a:p>
+            <a:r>
+              <a:rPr sz="2200" b="1">
+                <a:solidFill>
+                  <a:srgbClr val="0B3D2E"/>
+                </a:solidFill>
+              </a:rPr>
+              <a:t>Diagrama de la clase</a:t>
+            </a:r>
+          </a:p>
+        </p:txBody>
+      </p:sp>
+      <p:pic>
+        <p:nvPicPr>
+          <p:cNvPr id="3" name="Picture 2" descr="5d2a1b6ca3f5e9f4.png"/>
+          <p:cNvPicPr>
+            <a:picLocks noChangeAspect="1"/>
+          </p:cNvPicPr>
+          <p:nvPr/>
+        </p:nvPicPr>
+        <p:blipFill>
+          <a:blip r:embed="rId2"/>
+          <a:stretch>
+            <a:fillRect/>
+          </a:stretch>
+        </p:blipFill>
+        <p:spPr>
+          <a:xfrm>
+            <a:off x="2105442" y="1097280"/>
+            <a:ext cx="4933115" cy="5303520"/>
+          </a:xfrm>
+          <a:prstGeom prst="rect">
+            <a:avLst/>
+          </a:prstGeom>
+        </p:spPr>
+      </p:pic>
     </p:spTree>
   </p:cSld>
   <p:clrMapOvr>
@@ -3683,7 +3849,7 @@
                   <a:srgbClr val="22282E"/>
                 </a:solidFill>
               </a:rPr>
-              <a:t>•  Aprender a gestionar el ciclo de vida de las claves y secretos en sistemas reales: dónde guardarlos, cómo rotarlos, cómo evitar hardcodearlos en el código, y qué papel juegan los HSM, los servicios KMS (AWS/GCP/Azure) y HashiCorp Vault. El alumno entenderá conceptos como envelope encryption, cifrado como servicio, secretos dinámicos y el principio de mínimo privilegio aplicado a las claves.</a:t>
+              <a:t>•  Aprender a gestionar el ciclo de vida de las claves y secretos en sistemas reales: dónde guardarlos, cómo rotarlos, cómo evitar hardcodearlos en el código, y qué papel juegan los HSM, los servicios…</a:t>
             </a:r>
           </a:p>
         </p:txBody>
@@ -4077,7 +4243,7 @@
                   <a:srgbClr val="0B3D2E"/>
                 </a:solidFill>
               </a:rPr>
-              <a:t>📖 Definiciones y características</a:t>
+              <a:t>🧠 Explicación en profundidad</a:t>
             </a:r>
           </a:p>
         </p:txBody>
@@ -4115,97 +4281,97 @@
                   <a:srgbClr val="22282E"/>
                 </a:solidFill>
               </a:rPr>
-              <a:t>•  Gestión de secretos: prácticas y herramientas para almacenar, distribuir y rotar claves, tokens y credenciales. Característica: centraliza y audita el acceso.</a:t>
-            </a:r>
-          </a:p>
-          <a:p>
-            <a:pPr>
-              <a:spcAft>
-                <a:spcPts val="600"/>
-              </a:spcAft>
-            </a:pPr>
-            <a:r>
-              <a:rPr sz="1500">
-                <a:solidFill>
-                  <a:srgbClr val="22282E"/>
-                </a:solidFill>
-              </a:rPr>
-              <a:t>•  HSM (Hardware Security Module): dispositivo que genera y custodia claves sin exportarlas; ancla de confianza física.</a:t>
-            </a:r>
-          </a:p>
-          <a:p>
-            <a:pPr>
-              <a:spcAft>
-                <a:spcPts val="600"/>
-              </a:spcAft>
-            </a:pPr>
-            <a:r>
-              <a:rPr sz="1500">
-                <a:solidFill>
-                  <a:srgbClr val="22282E"/>
-                </a:solidFill>
-              </a:rPr>
-              <a:t>•  KMS: servicio gestionado que crea y usa claves; a menudo respaldado por HSM. Ofrece cifrado como servicio (la clave nunca sale).</a:t>
-            </a:r>
-          </a:p>
-          <a:p>
-            <a:pPr>
-              <a:spcAft>
-                <a:spcPts val="600"/>
-              </a:spcAft>
-            </a:pPr>
-            <a:r>
-              <a:rPr sz="1500">
-                <a:solidFill>
-                  <a:srgbClr val="22282E"/>
-                </a:solidFill>
-              </a:rPr>
-              <a:t>•  Envelope encryption: se cifra el dato con una DEK (clave de datos) y la DEK se cifra con una KEK (clave maestra) del KMS. Escala y limita el uso directo de la KEK.</a:t>
-            </a:r>
-          </a:p>
-          <a:p>
-            <a:pPr>
-              <a:spcAft>
-                <a:spcPts val="600"/>
-              </a:spcAft>
-            </a:pPr>
-            <a:r>
-              <a:rPr sz="1500">
-                <a:solidFill>
-                  <a:srgbClr val="22282E"/>
-                </a:solidFill>
-              </a:rPr>
-              <a:t>•  HashiCorp Vault: sistema para almacenar secretos, emitir credenciales dinámicas y actuar como motor de cifrado (transit).</a:t>
-            </a:r>
-          </a:p>
-          <a:p>
-            <a:pPr>
-              <a:spcAft>
-                <a:spcPts val="600"/>
-              </a:spcAft>
-            </a:pPr>
-            <a:r>
-              <a:rPr sz="1500">
-                <a:solidFill>
-                  <a:srgbClr val="22282E"/>
-                </a:solidFill>
-              </a:rPr>
-              <a:t>•  Secreto dinámico: credencial de vida corta generada bajo demanda (p. ej. acceso temporal a una base de datos), reduciendo el riesgo.</a:t>
-            </a:r>
-          </a:p>
-          <a:p>
-            <a:pPr>
-              <a:spcAft>
-                <a:spcPts val="600"/>
-              </a:spcAft>
-            </a:pPr>
-            <a:r>
-              <a:rPr sz="1500">
-                <a:solidFill>
-                  <a:srgbClr val="22282E"/>
-                </a:solidFill>
-              </a:rPr>
-              <a:t>•  Mínimo privilegio / rotación: cada identidad accede solo a lo necesario y las claves se renuevan periódicamente.</a:t>
+              <a:t>•  Toda la parte ha construido mecanismos que dependen de una clave secreta. Queda la</a:t>
+            </a:r>
+          </a:p>
+          <a:p>
+            <a:pPr>
+              <a:spcAft>
+                <a:spcPts val="600"/>
+              </a:spcAft>
+            </a:pPr>
+            <a:r>
+              <a:rPr sz="1500">
+                <a:solidFill>
+                  <a:srgbClr val="22282E"/>
+                </a:solidFill>
+              </a:rPr>
+              <a:t>•  pregunta incómoda: ¿dónde se guarda esa clave? Es un problema recursivo —cifrar la</a:t>
+            </a:r>
+          </a:p>
+          <a:p>
+            <a:pPr>
+              <a:spcAft>
+                <a:spcPts val="600"/>
+              </a:spcAft>
+            </a:pPr>
+            <a:r>
+              <a:rPr sz="1500">
+                <a:solidFill>
+                  <a:srgbClr val="22282E"/>
+                </a:solidFill>
+              </a:rPr>
+              <a:t>•  clave exige otra clave— y su mala resolución es responsable de más brechas que cualquier</a:t>
+            </a:r>
+          </a:p>
+          <a:p>
+            <a:pPr>
+              <a:spcAft>
+                <a:spcPts val="600"/>
+              </a:spcAft>
+            </a:pPr>
+            <a:r>
+              <a:rPr sz="1500">
+                <a:solidFill>
+                  <a:srgbClr val="22282E"/>
+                </a:solidFill>
+              </a:rPr>
+              <a:t>•  debilidad algorítmica.</a:t>
+            </a:r>
+          </a:p>
+          <a:p>
+            <a:pPr>
+              <a:spcAft>
+                <a:spcPts val="600"/>
+              </a:spcAft>
+            </a:pPr>
+            <a:r>
+              <a:rPr sz="1500">
+                <a:solidFill>
+                  <a:srgbClr val="22282E"/>
+                </a:solidFill>
+              </a:rPr>
+              <a:t>•  El anti-patrón universal es el secreto en el código. Una credencial escrita en el</a:t>
+            </a:r>
+          </a:p>
+          <a:p>
+            <a:pPr>
+              <a:spcAft>
+                <a:spcPts val="600"/>
+              </a:spcAft>
+            </a:pPr>
+            <a:r>
+              <a:rPr sz="1500">
+                <a:solidFill>
+                  <a:srgbClr val="22282E"/>
+                </a:solidFill>
+              </a:rPr>
+              <a:t>•  repositorio se replica en cada clon, viaja a cada CI, sobrevive en el historial de Git</a:t>
+            </a:r>
+          </a:p>
+          <a:p>
+            <a:pPr>
+              <a:spcAft>
+                <a:spcPts val="600"/>
+              </a:spcAft>
+            </a:pPr>
+            <a:r>
+              <a:rPr sz="1500">
+                <a:solidFill>
+                  <a:srgbClr val="22282E"/>
+                </a:solidFill>
+              </a:rPr>
+              <a:t>•  —borrar el fichero no la elimina, como fija la clase 018— y se filtra en cuanto el</a:t>
             </a:r>
           </a:p>
         </p:txBody>
@@ -4256,7 +4422,7 @@
                   <a:srgbClr val="0B3D2E"/>
                 </a:solidFill>
               </a:rPr>
-              <a:t>🧰 Herramientas y preparación</a:t>
+              <a:t>📖 Definiciones y características</a:t>
             </a:r>
           </a:p>
         </p:txBody>
@@ -4294,7 +4460,97 @@
                   <a:srgbClr val="22282E"/>
                 </a:solidFill>
               </a:rPr>
-              <a:t>•  vault --version 2&gt;/dev/null || echo "instala HashiCorp Vault para el lab"</a:t>
+              <a:t>•  Gestión de secretos: prácticas y herramientas para almacenar, distribuir y rotar claves, tokens y credenciales. Característica: centraliza y audita el acceso.</a:t>
+            </a:r>
+          </a:p>
+          <a:p>
+            <a:pPr>
+              <a:spcAft>
+                <a:spcPts val="600"/>
+              </a:spcAft>
+            </a:pPr>
+            <a:r>
+              <a:rPr sz="1500">
+                <a:solidFill>
+                  <a:srgbClr val="22282E"/>
+                </a:solidFill>
+              </a:rPr>
+              <a:t>•  HSM (Hardware Security Module): dispositivo que genera y custodia claves sin exportarlas; ancla de confianza física.</a:t>
+            </a:r>
+          </a:p>
+          <a:p>
+            <a:pPr>
+              <a:spcAft>
+                <a:spcPts val="600"/>
+              </a:spcAft>
+            </a:pPr>
+            <a:r>
+              <a:rPr sz="1500">
+                <a:solidFill>
+                  <a:srgbClr val="22282E"/>
+                </a:solidFill>
+              </a:rPr>
+              <a:t>•  KMS: servicio gestionado que crea y usa claves; a menudo respaldado por HSM. Ofrece cifrado como servicio (la clave nunca sale).</a:t>
+            </a:r>
+          </a:p>
+          <a:p>
+            <a:pPr>
+              <a:spcAft>
+                <a:spcPts val="600"/>
+              </a:spcAft>
+            </a:pPr>
+            <a:r>
+              <a:rPr sz="1500">
+                <a:solidFill>
+                  <a:srgbClr val="22282E"/>
+                </a:solidFill>
+              </a:rPr>
+              <a:t>•  Envelope encryption: se cifra el dato con una DEK (clave de datos) y la DEK se cifra con una KEK (clave maestra) del KMS. Escala y limita el uso directo de la KEK.</a:t>
+            </a:r>
+          </a:p>
+          <a:p>
+            <a:pPr>
+              <a:spcAft>
+                <a:spcPts val="600"/>
+              </a:spcAft>
+            </a:pPr>
+            <a:r>
+              <a:rPr sz="1500">
+                <a:solidFill>
+                  <a:srgbClr val="22282E"/>
+                </a:solidFill>
+              </a:rPr>
+              <a:t>•  HashiCorp Vault: sistema para almacenar secretos, emitir credenciales dinámicas y actuar como motor de cifrado (transit).</a:t>
+            </a:r>
+          </a:p>
+          <a:p>
+            <a:pPr>
+              <a:spcAft>
+                <a:spcPts val="600"/>
+              </a:spcAft>
+            </a:pPr>
+            <a:r>
+              <a:rPr sz="1500">
+                <a:solidFill>
+                  <a:srgbClr val="22282E"/>
+                </a:solidFill>
+              </a:rPr>
+              <a:t>•  Secreto dinámico: credencial de vida corta generada bajo demanda (p. ej. acceso temporal a una base de datos), reduciendo el riesgo.</a:t>
+            </a:r>
+          </a:p>
+          <a:p>
+            <a:pPr>
+              <a:spcAft>
+                <a:spcPts val="600"/>
+              </a:spcAft>
+            </a:pPr>
+            <a:r>
+              <a:rPr sz="1500">
+                <a:solidFill>
+                  <a:srgbClr val="22282E"/>
+                </a:solidFill>
+              </a:rPr>
+              <a:t>•  Mínimo privilegio / rotación: cada identidad accede solo a lo necesario y las claves se renuevan periódicamente.</a:t>
             </a:r>
           </a:p>
         </p:txBody>
@@ -4345,7 +4601,7 @@
                   <a:srgbClr val="0B3D2E"/>
                 </a:solidFill>
               </a:rPr>
-              <a:t>🧪 Laboratorio guiado</a:t>
+              <a:t>📔 Glosario</a:t>
             </a:r>
           </a:p>
         </p:txBody>
@@ -4383,97 +4639,97 @@
                   <a:srgbClr val="22282E"/>
                 </a:solidFill>
               </a:rPr>
-              <a:t>•  Arranca un Vault de laboratorio:</a:t>
-            </a:r>
-          </a:p>
-          <a:p>
-            <a:pPr>
-              <a:spcAft>
-                <a:spcPts val="600"/>
-              </a:spcAft>
-            </a:pPr>
-            <a:r>
-              <a:rPr sz="1500">
-                <a:solidFill>
-                  <a:srgbClr val="22282E"/>
-                </a:solidFill>
-              </a:rPr>
-              <a:t>•  vault server -dev</a:t>
-            </a:r>
-          </a:p>
-          <a:p>
-            <a:pPr>
-              <a:spcAft>
-                <a:spcPts val="600"/>
-              </a:spcAft>
-            </a:pPr>
-            <a:r>
-              <a:rPr sz="1500">
-                <a:solidFill>
-                  <a:srgbClr val="22282E"/>
-                </a:solidFill>
-              </a:rPr>
-              <a:t>•  export VAULTADDR='http://127.0.0.1:8200'</a:t>
-            </a:r>
-          </a:p>
-          <a:p>
-            <a:pPr>
-              <a:spcAft>
-                <a:spcPts val="600"/>
-              </a:spcAft>
-            </a:pPr>
-            <a:r>
-              <a:rPr sz="1500">
-                <a:solidFill>
-                  <a:srgbClr val="22282E"/>
-                </a:solidFill>
-              </a:rPr>
-              <a:t>•  Guarda y lee un secreto (KV):</a:t>
-            </a:r>
-          </a:p>
-          <a:p>
-            <a:pPr>
-              <a:spcAft>
-                <a:spcPts val="600"/>
-              </a:spcAft>
-            </a:pPr>
-            <a:r>
-              <a:rPr sz="1500">
-                <a:solidFill>
-                  <a:srgbClr val="22282E"/>
-                </a:solidFill>
-              </a:rPr>
-              <a:t>•  vault kv put secret/miapp dbpassword="prueba-lab-123"</a:t>
-            </a:r>
-          </a:p>
-          <a:p>
-            <a:pPr>
-              <a:spcAft>
-                <a:spcPts val="600"/>
-              </a:spcAft>
-            </a:pPr>
-            <a:r>
-              <a:rPr sz="1500">
-                <a:solidFill>
-                  <a:srgbClr val="22282E"/>
-                </a:solidFill>
-              </a:rPr>
-              <a:t>•  vault kv get secret/miapp</a:t>
-            </a:r>
-          </a:p>
-          <a:p>
-            <a:pPr>
-              <a:spcAft>
-                <a:spcPts val="600"/>
-              </a:spcAft>
-            </a:pPr>
-            <a:r>
-              <a:rPr sz="1500">
-                <a:solidFill>
-                  <a:srgbClr val="22282E"/>
-                </a:solidFill>
-              </a:rPr>
-              <a:t>•  Cifrado como servicio (transit). Habilita el motor transit, crea una clave y cifra/descifra datos sin que la aplicación vea nunca la clave:</a:t>
+              <a:t>•  Término — Definición concisa</a:t>
+            </a:r>
+          </a:p>
+          <a:p>
+            <a:pPr>
+              <a:spcAft>
+                <a:spcPts val="600"/>
+              </a:spcAft>
+            </a:pPr>
+            <a:r>
+              <a:rPr sz="1500">
+                <a:solidFill>
+                  <a:srgbClr val="22282E"/>
+                </a:solidFill>
+              </a:rPr>
+              <a:t>•  Secreto en el código — Credencial en el repositorio; anti-patrón que persiste en el historial</a:t>
+            </a:r>
+          </a:p>
+          <a:p>
+            <a:pPr>
+              <a:spcAft>
+                <a:spcPts val="600"/>
+              </a:spcAft>
+            </a:pPr>
+            <a:r>
+              <a:rPr sz="1500">
+                <a:solidFill>
+                  <a:srgbClr val="22282E"/>
+                </a:solidFill>
+              </a:rPr>
+              <a:t>•  Variable de entorno — Mejor que el código, pero visible en procesos y volcados</a:t>
+            </a:r>
+          </a:p>
+          <a:p>
+            <a:pPr>
+              <a:spcAft>
+                <a:spcPts val="600"/>
+              </a:spcAft>
+            </a:pPr>
+            <a:r>
+              <a:rPr sz="1500">
+                <a:solidFill>
+                  <a:srgbClr val="22282E"/>
+                </a:solidFill>
+              </a:rPr>
+              <a:t>•  HSM — Dispositivo que guarda claves y solo expone operaciones</a:t>
+            </a:r>
+          </a:p>
+          <a:p>
+            <a:pPr>
+              <a:spcAft>
+                <a:spcPts val="600"/>
+              </a:spcAft>
+            </a:pPr>
+            <a:r>
+              <a:rPr sz="1500">
+                <a:solidFill>
+                  <a:srgbClr val="22282E"/>
+                </a:solidFill>
+              </a:rPr>
+              <a:t>•  Resistencia a manipulación — Propiedad física del HSM frente a extracción</a:t>
+            </a:r>
+          </a:p>
+          <a:p>
+            <a:pPr>
+              <a:spcAft>
+                <a:spcPts val="600"/>
+              </a:spcAft>
+            </a:pPr>
+            <a:r>
+              <a:rPr sz="1500">
+                <a:solidFill>
+                  <a:srgbClr val="22282E"/>
+                </a:solidFill>
+              </a:rPr>
+              <a:t>•  KMS — Servicio gestionado de claves en la nube</a:t>
+            </a:r>
+          </a:p>
+          <a:p>
+            <a:pPr>
+              <a:spcAft>
+                <a:spcPts val="600"/>
+              </a:spcAft>
+            </a:pPr>
+            <a:r>
+              <a:rPr sz="1500">
+                <a:solidFill>
+                  <a:srgbClr val="22282E"/>
+                </a:solidFill>
+              </a:rPr>
+              <a:t>•  KEK — Clave maestra que cifra otras claves; vive en el KMS/HSM</a:t>
             </a:r>
           </a:p>
         </p:txBody>
@@ -4524,7 +4780,7 @@
                   <a:srgbClr val="0B3D2E"/>
                 </a:solidFill>
               </a:rPr>
-              <a:t>✍️ Ejercicios</a:t>
+              <a:t>🧪 Laboratorio guiado</a:t>
             </a:r>
           </a:p>
         </p:txBody>
@@ -4562,82 +4818,67 @@
                   <a:srgbClr val="22282E"/>
                 </a:solidFill>
               </a:rPr>
-              <a:t>•  Explica tres razones para no guardar secretos en Git.</a:t>
-            </a:r>
-          </a:p>
-          <a:p>
-            <a:pPr>
-              <a:spcAft>
-                <a:spcPts val="600"/>
-              </a:spcAft>
-            </a:pPr>
-            <a:r>
-              <a:rPr sz="1500">
-                <a:solidFill>
-                  <a:srgbClr val="22282E"/>
-                </a:solidFill>
-              </a:rPr>
-              <a:t>•  Diseña una jerarquía KEK/DEK para cifrar una base de datos.</a:t>
-            </a:r>
-          </a:p>
-          <a:p>
-            <a:pPr>
-              <a:spcAft>
-                <a:spcPts val="600"/>
-              </a:spcAft>
-            </a:pPr>
-            <a:r>
-              <a:rPr sz="1500">
-                <a:solidFill>
-                  <a:srgbClr val="22282E"/>
-                </a:solidFill>
-              </a:rPr>
-              <a:t>•  Configura un secreto en Vault y léelo desde un script.</a:t>
-            </a:r>
-          </a:p>
-          <a:p>
-            <a:pPr>
-              <a:spcAft>
-                <a:spcPts val="600"/>
-              </a:spcAft>
-            </a:pPr>
-            <a:r>
-              <a:rPr sz="1500">
-                <a:solidFill>
-                  <a:srgbClr val="22282E"/>
-                </a:solidFill>
-              </a:rPr>
-              <a:t>•  Compara HSM, KMS y Vault en propósito y garantías.</a:t>
-            </a:r>
-          </a:p>
-          <a:p>
-            <a:pPr>
-              <a:spcAft>
-                <a:spcPts val="600"/>
-              </a:spcAft>
-            </a:pPr>
-            <a:r>
-              <a:rPr sz="1500">
-                <a:solidFill>
-                  <a:srgbClr val="22282E"/>
-                </a:solidFill>
-              </a:rPr>
-              <a:t>•  Investiga cómo se detecta un secreto filtrado (git-secrets, gitleaks).</a:t>
-            </a:r>
-          </a:p>
-          <a:p>
-            <a:pPr>
-              <a:spcAft>
-                <a:spcPts val="600"/>
-              </a:spcAft>
-            </a:pPr>
-            <a:r>
-              <a:rPr sz="1500">
-                <a:solidFill>
-                  <a:srgbClr val="22282E"/>
-                </a:solidFill>
-              </a:rPr>
-              <a:t>•  Propón una política de rotación y expiración para claves de API.</a:t>
+              <a:t>•  Arranca un Vault de laboratorio:</a:t>
+            </a:r>
+          </a:p>
+          <a:p>
+            <a:pPr>
+              <a:spcAft>
+                <a:spcPts val="600"/>
+              </a:spcAft>
+            </a:pPr>
+            <a:r>
+              <a:rPr sz="1500">
+                <a:solidFill>
+                  <a:srgbClr val="22282E"/>
+                </a:solidFill>
+              </a:rPr>
+              <a:t>•  Guarda y lee un secreto (KV):</a:t>
+            </a:r>
+          </a:p>
+          <a:p>
+            <a:pPr>
+              <a:spcAft>
+                <a:spcPts val="600"/>
+              </a:spcAft>
+            </a:pPr>
+            <a:r>
+              <a:rPr sz="1500">
+                <a:solidFill>
+                  <a:srgbClr val="22282E"/>
+                </a:solidFill>
+              </a:rPr>
+              <a:t>•  Cifrado como servicio (transit). Habilita el motor transit, crea una clave y cifra/descifra datos sin que la aplicación vea nunca la clave:</a:t>
+            </a:r>
+          </a:p>
+          <a:p>
+            <a:pPr>
+              <a:spcAft>
+                <a:spcPts val="600"/>
+              </a:spcAft>
+            </a:pPr>
+            <a:r>
+              <a:rPr sz="1500">
+                <a:solidFill>
+                  <a:srgbClr val="22282E"/>
+                </a:solidFill>
+              </a:rPr>
+              <a:t>•  Envelope encryption (concepto). Explica el flujo: la app pide al KMS/Vault que cifre una DEK; almacena el dato cifrado con la DEK y la DEK cifrada junto a él; para leer, pide descifrar la DEK.</a:t>
+            </a:r>
+          </a:p>
+          <a:p>
+            <a:pPr>
+              <a:spcAft>
+                <a:spcPts val="600"/>
+              </a:spcAft>
+            </a:pPr>
+            <a:r>
+              <a:rPr sz="1500">
+                <a:solidFill>
+                  <a:srgbClr val="22282E"/>
+                </a:solidFill>
+              </a:rPr>
+              <a:t>•  Rotación. Rota la clave transit (vault write -f transit/keys/miclave/rotate) y verifica que los datos antiguos siguen descifrándose por versión.</a:t>
             </a:r>
           </a:p>
         </p:txBody>
@@ -4688,7 +4929,7 @@
                   <a:srgbClr val="0B3D2E"/>
                 </a:solidFill>
               </a:rPr>
-              <a:t>📝 Reto verificable</a:t>
+              <a:t>✍️ Ejercicios</a:t>
             </a:r>
           </a:p>
         </p:txBody>
@@ -4726,7 +4967,82 @@
                   <a:srgbClr val="22282E"/>
                 </a:solidFill>
               </a:rPr>
-              <a:t>•  Implementa envelope encryption en una pequeña app: genera una DEK por objeto, cifra los datos con AES-GCM y protege la DEK con el motor transit de Vault (o un KMS de laboratorio); guarda solo el dato cifrado y la DEK cifrada. Criterio de aceptación: los datos se recuperan pidiendo a Vault que descifre la DEK, la DEK en claro nunca se persiste, y rotar la clave maestra no impide leer datos antiguos.</a:t>
+              <a:t>•  Explica tres razones para no guardar secretos en Git.</a:t>
+            </a:r>
+          </a:p>
+          <a:p>
+            <a:pPr>
+              <a:spcAft>
+                <a:spcPts val="600"/>
+              </a:spcAft>
+            </a:pPr>
+            <a:r>
+              <a:rPr sz="1500">
+                <a:solidFill>
+                  <a:srgbClr val="22282E"/>
+                </a:solidFill>
+              </a:rPr>
+              <a:t>•  Diseña una jerarquía KEK/DEK para cifrar una base de datos.</a:t>
+            </a:r>
+          </a:p>
+          <a:p>
+            <a:pPr>
+              <a:spcAft>
+                <a:spcPts val="600"/>
+              </a:spcAft>
+            </a:pPr>
+            <a:r>
+              <a:rPr sz="1500">
+                <a:solidFill>
+                  <a:srgbClr val="22282E"/>
+                </a:solidFill>
+              </a:rPr>
+              <a:t>•  Configura un secreto en Vault y léelo desde un script.</a:t>
+            </a:r>
+          </a:p>
+          <a:p>
+            <a:pPr>
+              <a:spcAft>
+                <a:spcPts val="600"/>
+              </a:spcAft>
+            </a:pPr>
+            <a:r>
+              <a:rPr sz="1500">
+                <a:solidFill>
+                  <a:srgbClr val="22282E"/>
+                </a:solidFill>
+              </a:rPr>
+              <a:t>•  Compara HSM, KMS y Vault en propósito y garantías.</a:t>
+            </a:r>
+          </a:p>
+          <a:p>
+            <a:pPr>
+              <a:spcAft>
+                <a:spcPts val="600"/>
+              </a:spcAft>
+            </a:pPr>
+            <a:r>
+              <a:rPr sz="1500">
+                <a:solidFill>
+                  <a:srgbClr val="22282E"/>
+                </a:solidFill>
+              </a:rPr>
+              <a:t>•  Investiga cómo se detecta un secreto filtrado (git-secrets, gitleaks).</a:t>
+            </a:r>
+          </a:p>
+          <a:p>
+            <a:pPr>
+              <a:spcAft>
+                <a:spcPts val="600"/>
+              </a:spcAft>
+            </a:pPr>
+            <a:r>
+              <a:rPr sz="1500">
+                <a:solidFill>
+                  <a:srgbClr val="22282E"/>
+                </a:solidFill>
+              </a:rPr>
+              <a:t>•  Propón una política de rotación y expiración para claves de API.</a:t>
             </a:r>
           </a:p>
         </p:txBody>
